--- a/MCG_Marketecture.pptx
+++ b/MCG_Marketecture.pptx
@@ -3143,7 +3143,7 @@
                 <a:ea typeface="Inter" pitchFamily="34" charset="-122"/>
                 <a:cs typeface="Inter" pitchFamily="34" charset="-120"/>
               </a:rPr>
-              <a:t>Two declarative pipeline projects land three feeds as code</a:t>
+              <a:t>Two declarative projects land three feeds as code</a:t>
             </a:r>
             <a:endParaRPr lang="en-US" sz="1000" dirty="0"/>
           </a:p>
@@ -3270,7 +3270,7 @@
                 <a:ea typeface="Inter" pitchFamily="34" charset="-122"/>
                 <a:cs typeface="Inter" pitchFamily="34" charset="-120"/>
               </a:rPr>
-              <a:t>Declarative YAML pipelines — batch + streaming</a:t>
+              <a:t>Pipelines as code</a:t>
             </a:r>
             <a:endParaRPr lang="en-US" sz="1000" dirty="0"/>
           </a:p>
@@ -3309,7 +3309,7 @@
                 <a:ea typeface="Inter" pitchFamily="34" charset="-122"/>
                 <a:cs typeface="Inter" pitchFamily="34" charset="-120"/>
               </a:rPr>
-              <a:t>— imported via API, git-versioned</a:t>
+              <a:t>— YAML, via API</a:t>
             </a:r>
             <a:endParaRPr lang="en-US" sz="1000" dirty="0"/>
           </a:p>
@@ -3436,7 +3436,7 @@
                 <a:ea typeface="Inter" pitchFamily="34" charset="-122"/>
                 <a:cs typeface="Inter" pitchFamily="34" charset="-120"/>
               </a:rPr>
-              <a:t>8 silver transformation routes</a:t>
+              <a:t>8 silver routes</a:t>
             </a:r>
             <a:endParaRPr lang="en-US" sz="950" dirty="0"/>
           </a:p>
@@ -3453,7 +3453,7 @@
                 <a:ea typeface="Inter" pitchFamily="34" charset="-122"/>
                 <a:cs typeface="Inter" pitchFamily="34" charset="-120"/>
               </a:rPr>
-              <a:t>Carrier + UoM canonicalization</a:t>
+              <a:t>Carrier + UoM fixes</a:t>
             </a:r>
             <a:endParaRPr lang="en-US" sz="950" dirty="0"/>
           </a:p>
@@ -3470,7 +3470,7 @@
                 <a:ea typeface="Inter" pitchFamily="34" charset="-122"/>
                 <a:cs typeface="Inter" pitchFamily="34" charset="-120"/>
               </a:rPr>
-              <a:t>Talend address validation + geo</a:t>
+              <a:t>Talend geo checks</a:t>
             </a:r>
             <a:endParaRPr lang="en-US" sz="950" dirty="0"/>
           </a:p>
@@ -3504,7 +3504,7 @@
                 <a:ea typeface="Inter" pitchFamily="34" charset="-122"/>
                 <a:cs typeface="Inter" pitchFamily="34" charset="-120"/>
               </a:rPr>
-              <a:t>Stewardship for the rest</a:t>
+              <a:t>Stewardship the rest</a:t>
             </a:r>
             <a:endParaRPr lang="en-US" sz="950" dirty="0"/>
           </a:p>
@@ -3631,7 +3631,7 @@
                 <a:ea typeface="Inter" pitchFamily="34" charset="-122"/>
                 <a:cs typeface="Inter" pitchFamily="34" charset="-120"/>
               </a:rPr>
-              <a:t>Two governed data products</a:t>
+              <a:t>2 data products</a:t>
             </a:r>
             <a:endParaRPr lang="en-US" sz="950" dirty="0"/>
           </a:p>
@@ -3648,7 +3648,7 @@
                 <a:ea typeface="Inter" pitchFamily="34" charset="-122"/>
                 <a:cs typeface="Inter" pitchFamily="34" charset="-120"/>
               </a:rPr>
-              <a:t>Datasets attached via API</a:t>
+              <a:t>API-attached</a:t>
             </a:r>
             <a:endParaRPr lang="en-US" sz="950" dirty="0"/>
           </a:p>
@@ -3665,7 +3665,7 @@
                 <a:ea typeface="Inter" pitchFamily="34" charset="-122"/>
                 <a:cs typeface="Inter" pitchFamily="34" charset="-120"/>
               </a:rPr>
-              <a:t>Daily 06:00 UTC + event runs</a:t>
+              <a:t>Daily 06:00 UTC</a:t>
             </a:r>
             <a:endParaRPr lang="en-US" sz="950" dirty="0"/>
           </a:p>
@@ -3699,7 +3699,7 @@
                 <a:ea typeface="Inter" pitchFamily="34" charset="-122"/>
                 <a:cs typeface="Inter" pitchFamily="34" charset="-120"/>
               </a:rPr>
-              <a:t>Same tables, any engine</a:t>
+              <a:t>Open to any engine</a:t>
             </a:r>
             <a:endParaRPr lang="en-US" sz="950" dirty="0"/>
           </a:p>

--- a/MCG_Marketecture.pptx
+++ b/MCG_Marketecture.pptx
@@ -2138,8 +2138,8 @@
         </p:blipFill>
         <p:spPr>
           <a:xfrm>
-            <a:off x="455676" y="4645152"/>
-            <a:ext cx="597408" cy="640080"/>
+            <a:off x="365760" y="4673727"/>
+            <a:ext cx="777240" cy="582930"/>
           </a:xfrm>
           <a:prstGeom prst="rect">
             <a:avLst/>
@@ -2179,7 +2179,7 @@
                 <a:ea typeface="Inter" pitchFamily="34" charset="-122"/>
                 <a:cs typeface="Inter" pitchFamily="34" charset="-120"/>
               </a:rPr>
-              <a:t>Operational docs</a:t>
+              <a:t>Product master</a:t>
             </a:r>
             <a:endParaRPr lang="en-US" sz="1200" dirty="0"/>
           </a:p>
@@ -2218,7 +2218,7 @@
                 <a:ea typeface="Inter" pitchFamily="34" charset="-122"/>
                 <a:cs typeface="Inter" pitchFamily="34" charset="-120"/>
               </a:rPr>
-              <a:t>SOPs + contracts</a:t>
+              <a:t>Salesforce objects</a:t>
             </a:r>
             <a:endParaRPr lang="en-US" sz="900" dirty="0"/>
           </a:p>
@@ -2257,7 +2257,7 @@
                 <a:ea typeface="Inter" pitchFamily="34" charset="-122"/>
                 <a:cs typeface="Inter" pitchFamily="34" charset="-120"/>
               </a:rPr>
-              <a:t>25 DOCX knowledge base</a:t>
+              <a:t>Weights · suppliers</a:t>
             </a:r>
             <a:endParaRPr lang="en-US" sz="900" dirty="0"/>
           </a:p>
@@ -2296,7 +2296,7 @@
                 <a:ea typeface="Inter" pitchFamily="34" charset="-122"/>
                 <a:cs typeface="Inter" pitchFamily="34" charset="-120"/>
               </a:rPr>
-              <a:t>Qlik Answers</a:t>
+              <a:t>Every 15 min</a:t>
             </a:r>
             <a:endParaRPr lang="en-US" sz="850" dirty="0"/>
           </a:p>
@@ -2368,8 +2368,8 @@
         </p:blipFill>
         <p:spPr>
           <a:xfrm>
-            <a:off x="434340" y="5486400"/>
-            <a:ext cx="640080" cy="640080"/>
+            <a:off x="455676" y="5486400"/>
+            <a:ext cx="597408" cy="640080"/>
           </a:xfrm>
           <a:prstGeom prst="rect">
             <a:avLst/>
@@ -2409,7 +2409,7 @@
                 <a:ea typeface="Inter" pitchFamily="34" charset="-122"/>
                 <a:cs typeface="Inter" pitchFamily="34" charset="-120"/>
               </a:rPr>
-              <a:t>Validated addresses</a:t>
+              <a:t>Operational docs</a:t>
             </a:r>
             <a:endParaRPr lang="en-US" sz="1200" dirty="0"/>
           </a:p>
@@ -2448,7 +2448,7 @@
                 <a:ea typeface="Inter" pitchFamily="34" charset="-122"/>
                 <a:cs typeface="Inter" pitchFamily="34" charset="-120"/>
               </a:rPr>
-              <a:t>Talend + Nominatim</a:t>
+              <a:t>SOPs + contracts</a:t>
             </a:r>
             <a:endParaRPr lang="en-US" sz="900" dirty="0"/>
           </a:p>
@@ -2487,7 +2487,7 @@
                 <a:ea typeface="Inter" pitchFamily="34" charset="-122"/>
                 <a:cs typeface="Inter" pitchFamily="34" charset="-120"/>
               </a:rPr>
-              <a:t>Geocoded QVD, 15 min</a:t>
+              <a:t>25 DOCX knowledge base</a:t>
             </a:r>
             <a:endParaRPr lang="en-US" sz="900" dirty="0"/>
           </a:p>
@@ -2526,7 +2526,7 @@
                 <a:ea typeface="Inter" pitchFamily="34" charset="-122"/>
                 <a:cs typeface="Inter" pitchFamily="34" charset="-120"/>
               </a:rPr>
-              <a:t>Stewardship loop</a:t>
+              <a:t>Qlik Answers</a:t>
             </a:r>
             <a:endParaRPr lang="en-US" sz="850" dirty="0"/>
           </a:p>
@@ -3470,7 +3470,24 @@
                 <a:ea typeface="Inter" pitchFamily="34" charset="-122"/>
                 <a:cs typeface="Inter" pitchFamily="34" charset="-120"/>
               </a:rPr>
-              <a:t>Talend geo checks</a:t>
+              <a:t>Talend + Nominatim</a:t>
+            </a:r>
+            <a:endParaRPr lang="en-US" sz="950" dirty="0"/>
+          </a:p>
+          <a:p>
+            <a:pPr indent="0" marL="0">
+              <a:buNone/>
+            </a:pPr>
+            <a:r>
+              <a:rPr lang="en-US" sz="950" dirty="0">
+                <a:solidFill>
+                  <a:srgbClr val="545659"/>
+                </a:solidFill>
+                <a:latin typeface="Inter" pitchFamily="34" charset="0"/>
+                <a:ea typeface="Inter" pitchFamily="34" charset="-122"/>
+                <a:cs typeface="Inter" pitchFamily="34" charset="-120"/>
+              </a:rPr>
+              <a:t>address validation</a:t>
             </a:r>
             <a:endParaRPr lang="en-US" sz="950" dirty="0"/>
           </a:p>

--- a/MCG_Marketecture.pptx
+++ b/MCG_Marketecture.pptx
@@ -1004,46 +1004,46 @@
         </p:nvSpPr>
         <p:spPr>
           <a:xfrm>
+            <a:off x="5692140" y="859536"/>
+            <a:ext cx="1783080" cy="274320"/>
+          </a:xfrm>
+          <a:prstGeom prst="rect">
+            <a:avLst/>
+          </a:prstGeom>
+          <a:noFill/>
+          <a:ln/>
+        </p:spPr>
+        <p:txBody>
+          <a:bodyPr wrap="square" lIns="0" tIns="0" rIns="0" bIns="0" rtlCol="0" anchor="ctr"/>
+          <a:lstStyle/>
+          <a:p>
+            <a:pPr algn="ctr" indent="0" marL="0">
+              <a:buNone/>
+            </a:pPr>
+            <a:r>
+              <a:rPr lang="en-US" sz="1100" b="1" spc="200" kern="0" dirty="0">
+                <a:solidFill>
+                  <a:srgbClr val="19416C"/>
+                </a:solidFill>
+                <a:latin typeface="Inter" pitchFamily="34" charset="0"/>
+                <a:ea typeface="Inter" pitchFamily="34" charset="-122"/>
+                <a:cs typeface="Inter" pitchFamily="34" charset="-120"/>
+              </a:rPr>
+              <a:t>SYSTEM OF RECORD</a:t>
+            </a:r>
+            <a:endParaRPr lang="en-US" sz="1100" dirty="0"/>
+          </a:p>
+        </p:txBody>
+      </p:sp>
+      <p:sp>
+        <p:nvSpPr>
+          <p:cNvPr id="7" name="Text 4"/>
+          <p:cNvSpPr/>
+          <p:nvPr/>
+        </p:nvSpPr>
+        <p:spPr>
+          <a:xfrm>
             <a:off x="2880360" y="859536"/>
-            <a:ext cx="1783080" cy="274320"/>
-          </a:xfrm>
-          <a:prstGeom prst="rect">
-            <a:avLst/>
-          </a:prstGeom>
-          <a:noFill/>
-          <a:ln/>
-        </p:spPr>
-        <p:txBody>
-          <a:bodyPr wrap="square" lIns="0" tIns="0" rIns="0" bIns="0" rtlCol="0" anchor="ctr"/>
-          <a:lstStyle/>
-          <a:p>
-            <a:pPr algn="ctr" indent="0" marL="0">
-              <a:buNone/>
-            </a:pPr>
-            <a:r>
-              <a:rPr lang="en-US" sz="1100" b="1" spc="200" kern="0" dirty="0">
-                <a:solidFill>
-                  <a:srgbClr val="19416C"/>
-                </a:solidFill>
-                <a:latin typeface="Inter" pitchFamily="34" charset="0"/>
-                <a:ea typeface="Inter" pitchFamily="34" charset="-122"/>
-                <a:cs typeface="Inter" pitchFamily="34" charset="-120"/>
-              </a:rPr>
-              <a:t>SYSTEM OF RECORD</a:t>
-            </a:r>
-            <a:endParaRPr lang="en-US" sz="1100" dirty="0"/>
-          </a:p>
-        </p:txBody>
-      </p:sp>
-      <p:sp>
-        <p:nvSpPr>
-          <p:cNvPr id="7" name="Text 4"/>
-          <p:cNvSpPr/>
-          <p:nvPr/>
-        </p:nvSpPr>
-        <p:spPr>
-          <a:xfrm>
-            <a:off x="4800600" y="859536"/>
             <a:ext cx="2423160" cy="274320"/>
           </a:xfrm>
           <a:prstGeom prst="rect">
@@ -2540,7 +2540,7 @@
         </p:nvSpPr>
         <p:spPr>
           <a:xfrm>
-            <a:off x="2880360" y="1207008"/>
+            <a:off x="5692140" y="1207008"/>
             <a:ext cx="1783080" cy="4983480"/>
           </a:xfrm>
           <a:prstGeom prst="rect">
@@ -2565,7 +2565,7 @@
         </p:nvSpPr>
         <p:spPr>
           <a:xfrm>
-            <a:off x="2880360" y="1207008"/>
+            <a:off x="5692140" y="1207008"/>
             <a:ext cx="1783080" cy="73152"/>
           </a:xfrm>
           <a:prstGeom prst="rect">
@@ -2590,7 +2590,7 @@
         </p:nvSpPr>
         <p:spPr>
           <a:xfrm>
-            <a:off x="2880360" y="1618488"/>
+            <a:off x="5692140" y="1618488"/>
             <a:ext cx="1783080" cy="640080"/>
           </a:xfrm>
           <a:prstGeom prst="rect">
@@ -2629,7 +2629,7 @@
         </p:nvSpPr>
         <p:spPr>
           <a:xfrm>
-            <a:off x="2880360" y="2286000"/>
+            <a:off x="5692140" y="2286000"/>
             <a:ext cx="1783080" cy="237744"/>
           </a:xfrm>
           <a:prstGeom prst="rect">
@@ -2676,7 +2676,7 @@
         </p:blipFill>
         <p:spPr>
           <a:xfrm>
-            <a:off x="3337560" y="2624328"/>
+            <a:off x="6149340" y="2624328"/>
             <a:ext cx="868680" cy="1280160"/>
           </a:xfrm>
           <a:prstGeom prst="rect">
@@ -2692,7 +2692,7 @@
         </p:nvSpPr>
         <p:spPr>
           <a:xfrm>
-            <a:off x="2971800" y="4041648"/>
+            <a:off x="5783580" y="4041648"/>
             <a:ext cx="1600200" cy="1417320"/>
           </a:xfrm>
           <a:prstGeom prst="rect">
@@ -2901,7 +2901,7 @@
         </p:nvSpPr>
         <p:spPr>
           <a:xfrm>
-            <a:off x="2971800" y="5806440"/>
+            <a:off x="5783580" y="5806440"/>
             <a:ext cx="1600200" cy="274320"/>
           </a:xfrm>
           <a:prstGeom prst="rect">
@@ -2926,7 +2926,7 @@
         </p:nvSpPr>
         <p:spPr>
           <a:xfrm>
-            <a:off x="2971800" y="5806440"/>
+            <a:off x="5783580" y="5806440"/>
             <a:ext cx="1600200" cy="274320"/>
           </a:xfrm>
           <a:prstGeom prst="rect">
@@ -2965,7 +2965,7 @@
         </p:nvSpPr>
         <p:spPr>
           <a:xfrm>
-            <a:off x="4764024" y="3602736"/>
+            <a:off x="5486400" y="3602736"/>
             <a:ext cx="164592" cy="192024"/>
           </a:xfrm>
           <a:prstGeom prst="rightArrow">
@@ -2990,7 +2990,7 @@
         </p:nvSpPr>
         <p:spPr>
           <a:xfrm rot="16200000">
-            <a:off x="4434840" y="2555748"/>
+            <a:off x="2514600" y="2555748"/>
             <a:ext cx="822960" cy="274320"/>
           </a:xfrm>
           <a:prstGeom prst="rect">
@@ -3029,7 +3029,7 @@
         </p:nvSpPr>
         <p:spPr>
           <a:xfrm>
-            <a:off x="5029200" y="1207008"/>
+            <a:off x="3108960" y="1207008"/>
             <a:ext cx="2331720" cy="4983480"/>
           </a:xfrm>
           <a:prstGeom prst="rect">
@@ -3054,7 +3054,7 @@
         </p:nvSpPr>
         <p:spPr>
           <a:xfrm>
-            <a:off x="5029200" y="1207008"/>
+            <a:off x="3108960" y="1207008"/>
             <a:ext cx="2331720" cy="73152"/>
           </a:xfrm>
           <a:prstGeom prst="rect">
@@ -3079,7 +3079,7 @@
         </p:nvSpPr>
         <p:spPr>
           <a:xfrm>
-            <a:off x="5029200" y="1371600"/>
+            <a:off x="3108960" y="1371600"/>
             <a:ext cx="2331720" cy="310896"/>
           </a:xfrm>
           <a:prstGeom prst="rect">
@@ -3118,7 +3118,7 @@
         </p:nvSpPr>
         <p:spPr>
           <a:xfrm>
-            <a:off x="5120640" y="1682496"/>
+            <a:off x="3200400" y="1682496"/>
             <a:ext cx="2148840" cy="219456"/>
           </a:xfrm>
           <a:prstGeom prst="rect">
@@ -3157,7 +3157,7 @@
         </p:nvSpPr>
         <p:spPr>
           <a:xfrm>
-            <a:off x="5166360" y="1993392"/>
+            <a:off x="3246120" y="1993392"/>
             <a:ext cx="2057400" cy="1207008"/>
           </a:xfrm>
           <a:prstGeom prst="rect">
@@ -3182,7 +3182,7 @@
         </p:nvSpPr>
         <p:spPr>
           <a:xfrm>
-            <a:off x="5257800" y="2066544"/>
+            <a:off x="3337560" y="2066544"/>
             <a:ext cx="1874520" cy="256032"/>
           </a:xfrm>
           <a:prstGeom prst="rect">
@@ -3229,7 +3229,7 @@
         </p:blipFill>
         <p:spPr>
           <a:xfrm>
-            <a:off x="5463540" y="2377440"/>
+            <a:off x="3543300" y="2377440"/>
             <a:ext cx="1463040" cy="365760"/>
           </a:xfrm>
           <a:prstGeom prst="rect">
@@ -3245,7 +3245,7 @@
         </p:nvSpPr>
         <p:spPr>
           <a:xfrm>
-            <a:off x="5257800" y="2798064"/>
+            <a:off x="3337560" y="2798064"/>
             <a:ext cx="1874520" cy="182880"/>
           </a:xfrm>
           <a:prstGeom prst="rect">
@@ -3284,7 +3284,7 @@
         </p:nvSpPr>
         <p:spPr>
           <a:xfrm>
-            <a:off x="5257800" y="2962656"/>
+            <a:off x="3337560" y="2962656"/>
             <a:ext cx="1874520" cy="182880"/>
           </a:xfrm>
           <a:prstGeom prst="rect">
@@ -3323,7 +3323,7 @@
         </p:nvSpPr>
         <p:spPr>
           <a:xfrm>
-            <a:off x="5166360" y="3273552"/>
+            <a:off x="3246120" y="3273552"/>
             <a:ext cx="2057400" cy="1280160"/>
           </a:xfrm>
           <a:prstGeom prst="rect">
@@ -3348,7 +3348,7 @@
         </p:nvSpPr>
         <p:spPr>
           <a:xfrm>
-            <a:off x="5257800" y="3346704"/>
+            <a:off x="3337560" y="3346704"/>
             <a:ext cx="1874520" cy="237744"/>
           </a:xfrm>
           <a:prstGeom prst="rect">
@@ -3395,7 +3395,7 @@
         </p:blipFill>
         <p:spPr>
           <a:xfrm>
-            <a:off x="5239512" y="3731323"/>
+            <a:off x="3319272" y="3731323"/>
             <a:ext cx="502920" cy="565785"/>
           </a:xfrm>
           <a:prstGeom prst="rect">
@@ -3411,7 +3411,7 @@
         </p:nvSpPr>
         <p:spPr>
           <a:xfrm>
-            <a:off x="5806440" y="3639312"/>
+            <a:off x="3886200" y="3639312"/>
             <a:ext cx="1325880" cy="868680"/>
           </a:xfrm>
           <a:prstGeom prst="rect">
@@ -3535,7 +3535,7 @@
         </p:nvSpPr>
         <p:spPr>
           <a:xfrm>
-            <a:off x="5166360" y="4645152"/>
+            <a:off x="3246120" y="4645152"/>
             <a:ext cx="2057400" cy="1417320"/>
           </a:xfrm>
           <a:prstGeom prst="rect">
@@ -3560,7 +3560,7 @@
         </p:nvSpPr>
         <p:spPr>
           <a:xfrm>
-            <a:off x="5257800" y="4718304"/>
+            <a:off x="3337560" y="4718304"/>
             <a:ext cx="1874520" cy="237744"/>
           </a:xfrm>
           <a:prstGeom prst="rect">
@@ -3607,7 +3607,7 @@
         </p:blipFill>
         <p:spPr>
           <a:xfrm>
-            <a:off x="5239512" y="5166360"/>
+            <a:off x="3319272" y="5166360"/>
             <a:ext cx="502920" cy="502920"/>
           </a:xfrm>
           <a:prstGeom prst="rect">
@@ -3623,7 +3623,7 @@
         </p:nvSpPr>
         <p:spPr>
           <a:xfrm>
-            <a:off x="5806440" y="5010912"/>
+            <a:off x="3886200" y="5010912"/>
             <a:ext cx="1325880" cy="1051560"/>
           </a:xfrm>
           <a:prstGeom prst="rect">
@@ -3730,7 +3730,7 @@
         </p:nvSpPr>
         <p:spPr>
           <a:xfrm>
-            <a:off x="7461504" y="3602736"/>
+            <a:off x="7516368" y="3602736"/>
             <a:ext cx="164592" cy="192024"/>
           </a:xfrm>
           <a:prstGeom prst="rightArrow">
@@ -3755,7 +3755,7 @@
         </p:nvSpPr>
         <p:spPr>
           <a:xfrm rot="16200000">
-            <a:off x="7132320" y="2555748"/>
+            <a:off x="5157216" y="2555748"/>
             <a:ext cx="822960" cy="274320"/>
           </a:xfrm>
           <a:prstGeom prst="rect">
@@ -4712,7 +4712,7 @@
         </p:nvSpPr>
         <p:spPr>
           <a:xfrm rot="16200000">
-            <a:off x="9601200" y="2555748"/>
+            <a:off x="7187184" y="2555748"/>
             <a:ext cx="822960" cy="274320"/>
           </a:xfrm>
           <a:prstGeom prst="rect">

--- a/MCG_Marketecture.pptx
+++ b/MCG_Marketecture.pptx
@@ -951,7 +951,7 @@
                 <a:ea typeface="Inter" pitchFamily="34" charset="-122"/>
                 <a:cs typeface="Inter" pitchFamily="34" charset="-120"/>
               </a:rPr>
-              <a:t>How MCG lands WMS, IoT, and CRM data in the Open Lakehouse and turns it into governed analytics, prediction, and agents</a:t>
+              <a:t>INTERNAL — DEMO ENABLEMENT  ·  How MCG lands WMS, IoT, and CRM in the Open Lakehouse for governed analytics and AI</a:t>
             </a:r>
             <a:endParaRPr lang="en-US" sz="1200" dirty="0"/>
           </a:p>

--- a/MCG_Marketecture.pptx
+++ b/MCG_Marketecture.pptx
@@ -503,8 +503,8 @@
             <a:r>
               <a:rPr lang="en-US" dirty="0"/>
               <a:t>TALK TRACK · 60 SECONDS
-Meridian Commerce Group runs on three systems that never talked: a PostgreSQL warehouse database, cold-chain IoT sensors streaming through Kafka, and Salesforce. Seven data-quality nightmares cost them $127M a year.
-The fix is efficiency by design. Two declarative Qlik Cloud Pipelines — version-controlled YAML, imported through the API — land every feed in the Open Lakehouse: Iceberg tables on S3, bronze to silver to gold. Eight transformation routes canonicalize six carrier vocabularies, standardize units, and score trust. Talend validates and geocodes every Salesforce address on a 15-minute cycle, routing the unfixable to Stewardship.
+Meridian Commerce Group runs on three systems that never talked: a PostgreSQL warehouse database, cold-chain IoT sensors streaming through Kafka, and Meridian CRM. Seven data-quality nightmares cost them $127M a year.
+The fix is efficiency by design. Two declarative Qlik Cloud Pipelines — version-controlled YAML, imported through the API — land every feed in the Open Lakehouse: Iceberg tables on S3, bronze to silver to gold. Eight transformation routes canonicalize six carrier vocabularies, standardize units, and score trust. Talend standardizes every CRM address and bulk-geocodes the batch, routing what it resolves to Iceberg and what it can't to a Stewardship sprint.
 Two governed data products serve the business — read straight from the lakehouse through Amazon Athena, no copies. On top: two analytics apps whose sheets are authored by an AI agent over MCP, Predict models for exceedance and late-delivery risk, Answers grounded on 25 operational documents, and a Discovery Agent watching it all.
 One command deploys the whole stack. That's pipelines as code, and AI that actually ships.</a:t>
             </a:r>
@@ -945,7 +945,7 @@
             <a:r>
               <a:rPr lang="en-US" sz="1200" i="1" dirty="0">
                 <a:solidFill>
-                  <a:srgbClr val="545659"/>
+                  <a:srgbClr val="54565A"/>
                 </a:solidFill>
                 <a:latin typeface="Inter" pitchFamily="34" charset="0"/>
                 <a:ea typeface="Inter" pitchFamily="34" charset="-122"/>
@@ -1292,7 +1292,7 @@
             <a:r>
               <a:rPr lang="en-US" sz="900" dirty="0">
                 <a:solidFill>
-                  <a:srgbClr val="545659"/>
+                  <a:srgbClr val="54565A"/>
                 </a:solidFill>
                 <a:latin typeface="Inter" pitchFamily="34" charset="0"/>
                 <a:ea typeface="Inter" pitchFamily="34" charset="-122"/>
@@ -1331,7 +1331,7 @@
             <a:r>
               <a:rPr lang="en-US" sz="900" dirty="0">
                 <a:solidFill>
-                  <a:srgbClr val="545659"/>
+                  <a:srgbClr val="54565A"/>
                 </a:solidFill>
                 <a:latin typeface="Inter" pitchFamily="34" charset="0"/>
                 <a:ea typeface="Inter" pitchFamily="34" charset="-122"/>
@@ -1522,7 +1522,7 @@
             <a:r>
               <a:rPr lang="en-US" sz="900" dirty="0">
                 <a:solidFill>
-                  <a:srgbClr val="545659"/>
+                  <a:srgbClr val="54565A"/>
                 </a:solidFill>
                 <a:latin typeface="Inter" pitchFamily="34" charset="0"/>
                 <a:ea typeface="Inter" pitchFamily="34" charset="-122"/>
@@ -1561,7 +1561,7 @@
             <a:r>
               <a:rPr lang="en-US" sz="900" dirty="0">
                 <a:solidFill>
-                  <a:srgbClr val="545659"/>
+                  <a:srgbClr val="54565A"/>
                 </a:solidFill>
                 <a:latin typeface="Inter" pitchFamily="34" charset="0"/>
                 <a:ea typeface="Inter" pitchFamily="34" charset="-122"/>
@@ -1752,7 +1752,7 @@
             <a:r>
               <a:rPr lang="en-US" sz="900" dirty="0">
                 <a:solidFill>
-                  <a:srgbClr val="545659"/>
+                  <a:srgbClr val="54565A"/>
                 </a:solidFill>
                 <a:latin typeface="Inter" pitchFamily="34" charset="0"/>
                 <a:ea typeface="Inter" pitchFamily="34" charset="-122"/>
@@ -1791,7 +1791,7 @@
             <a:r>
               <a:rPr lang="en-US" sz="900" dirty="0">
                 <a:solidFill>
-                  <a:srgbClr val="545659"/>
+                  <a:srgbClr val="54565A"/>
                 </a:solidFill>
                 <a:latin typeface="Inter" pitchFamily="34" charset="0"/>
                 <a:ea typeface="Inter" pitchFamily="34" charset="-122"/>
@@ -1949,7 +1949,7 @@
                 <a:ea typeface="Inter" pitchFamily="34" charset="-122"/>
                 <a:cs typeface="Inter" pitchFamily="34" charset="-120"/>
               </a:rPr>
-              <a:t>Salesforce CRM</a:t>
+              <a:t>Meridian CRM</a:t>
             </a:r>
             <a:endParaRPr lang="en-US" sz="1200" dirty="0"/>
           </a:p>
@@ -1982,7 +1982,7 @@
             <a:r>
               <a:rPr lang="en-US" sz="900" dirty="0">
                 <a:solidFill>
-                  <a:srgbClr val="545659"/>
+                  <a:srgbClr val="54565A"/>
                 </a:solidFill>
                 <a:latin typeface="Inter" pitchFamily="34" charset="0"/>
                 <a:ea typeface="Inter" pitchFamily="34" charset="-122"/>
@@ -2021,7 +2021,7 @@
             <a:r>
               <a:rPr lang="en-US" sz="900" dirty="0">
                 <a:solidFill>
-                  <a:srgbClr val="545659"/>
+                  <a:srgbClr val="54565A"/>
                 </a:solidFill>
                 <a:latin typeface="Inter" pitchFamily="34" charset="0"/>
                 <a:ea typeface="Inter" pitchFamily="34" charset="-122"/>
@@ -2066,7 +2066,7 @@
                 <a:ea typeface="Inter" pitchFamily="34" charset="-122"/>
                 <a:cs typeface="Inter" pitchFamily="34" charset="-120"/>
               </a:rPr>
-              <a:t>Every 15 min</a:t>
+              <a:t>MySQL CDC</a:t>
             </a:r>
             <a:endParaRPr lang="en-US" sz="850" dirty="0"/>
           </a:p>
@@ -2212,13 +2212,13 @@
             <a:r>
               <a:rPr lang="en-US" sz="900" dirty="0">
                 <a:solidFill>
-                  <a:srgbClr val="545659"/>
-                </a:solidFill>
-                <a:latin typeface="Inter" pitchFamily="34" charset="0"/>
-                <a:ea typeface="Inter" pitchFamily="34" charset="-122"/>
-                <a:cs typeface="Inter" pitchFamily="34" charset="-120"/>
-              </a:rPr>
-              <a:t>Salesforce objects</a:t>
+                  <a:srgbClr val="54565A"/>
+                </a:solidFill>
+                <a:latin typeface="Inter" pitchFamily="34" charset="0"/>
+                <a:ea typeface="Inter" pitchFamily="34" charset="-122"/>
+                <a:cs typeface="Inter" pitchFamily="34" charset="-120"/>
+              </a:rPr>
+              <a:t>CRM tables</a:t>
             </a:r>
             <a:endParaRPr lang="en-US" sz="900" dirty="0"/>
           </a:p>
@@ -2251,7 +2251,7 @@
             <a:r>
               <a:rPr lang="en-US" sz="900" dirty="0">
                 <a:solidFill>
-                  <a:srgbClr val="545659"/>
+                  <a:srgbClr val="54565A"/>
                 </a:solidFill>
                 <a:latin typeface="Inter" pitchFamily="34" charset="0"/>
                 <a:ea typeface="Inter" pitchFamily="34" charset="-122"/>
@@ -2296,7 +2296,7 @@
                 <a:ea typeface="Inter" pitchFamily="34" charset="-122"/>
                 <a:cs typeface="Inter" pitchFamily="34" charset="-120"/>
               </a:rPr>
-              <a:t>Every 15 min</a:t>
+              <a:t>MySQL CDC</a:t>
             </a:r>
             <a:endParaRPr lang="en-US" sz="850" dirty="0"/>
           </a:p>
@@ -2442,7 +2442,7 @@
             <a:r>
               <a:rPr lang="en-US" sz="900" dirty="0">
                 <a:solidFill>
-                  <a:srgbClr val="545659"/>
+                  <a:srgbClr val="54565A"/>
                 </a:solidFill>
                 <a:latin typeface="Inter" pitchFamily="34" charset="0"/>
                 <a:ea typeface="Inter" pitchFamily="34" charset="-122"/>
@@ -2481,7 +2481,7 @@
             <a:r>
               <a:rPr lang="en-US" sz="900" dirty="0">
                 <a:solidFill>
-                  <a:srgbClr val="545659"/>
+                  <a:srgbClr val="54565A"/>
                 </a:solidFill>
                 <a:latin typeface="Inter" pitchFamily="34" charset="0"/>
                 <a:ea typeface="Inter" pitchFamily="34" charset="-122"/>
@@ -2972,11 +2972,11 @@
             <a:avLst/>
           </a:prstGeom>
           <a:solidFill>
-            <a:srgbClr val="545659"/>
+            <a:srgbClr val="54565A"/>
           </a:solidFill>
           <a:ln w="12700">
             <a:solidFill>
-              <a:srgbClr val="545659"/>
+              <a:srgbClr val="54565A"/>
             </a:solidFill>
             <a:prstDash val="solid"/>
           </a:ln>
@@ -3009,7 +3009,7 @@
             <a:r>
               <a:rPr lang="en-US" sz="1200" b="1" dirty="0">
                 <a:solidFill>
-                  <a:srgbClr val="545659"/>
+                  <a:srgbClr val="54565A"/>
                 </a:solidFill>
                 <a:latin typeface="Inter" pitchFamily="34" charset="0"/>
                 <a:ea typeface="Inter" pitchFamily="34" charset="-122"/>
@@ -3137,7 +3137,7 @@
             <a:r>
               <a:rPr lang="en-US" sz="1000" i="1" dirty="0">
                 <a:solidFill>
-                  <a:srgbClr val="545659"/>
+                  <a:srgbClr val="54565A"/>
                 </a:solidFill>
                 <a:latin typeface="Inter" pitchFamily="34" charset="0"/>
                 <a:ea typeface="Inter" pitchFamily="34" charset="-122"/>
@@ -3264,7 +3264,7 @@
             <a:r>
               <a:rPr lang="en-US" sz="1000" dirty="0">
                 <a:solidFill>
-                  <a:srgbClr val="545659"/>
+                  <a:srgbClr val="54565A"/>
                 </a:solidFill>
                 <a:latin typeface="Inter" pitchFamily="34" charset="0"/>
                 <a:ea typeface="Inter" pitchFamily="34" charset="-122"/>
@@ -3303,7 +3303,7 @@
             <a:r>
               <a:rPr lang="en-US" sz="1000" i="1" dirty="0">
                 <a:solidFill>
-                  <a:srgbClr val="545659"/>
+                  <a:srgbClr val="54565A"/>
                 </a:solidFill>
                 <a:latin typeface="Inter" pitchFamily="34" charset="0"/>
                 <a:ea typeface="Inter" pitchFamily="34" charset="-122"/>
@@ -3430,7 +3430,7 @@
             <a:r>
               <a:rPr lang="en-US" sz="950" dirty="0">
                 <a:solidFill>
-                  <a:srgbClr val="545659"/>
+                  <a:srgbClr val="54565A"/>
                 </a:solidFill>
                 <a:latin typeface="Inter" pitchFamily="34" charset="0"/>
                 <a:ea typeface="Inter" pitchFamily="34" charset="-122"/>
@@ -3447,7 +3447,7 @@
             <a:r>
               <a:rPr lang="en-US" sz="950" dirty="0">
                 <a:solidFill>
-                  <a:srgbClr val="545659"/>
+                  <a:srgbClr val="54565A"/>
                 </a:solidFill>
                 <a:latin typeface="Inter" pitchFamily="34" charset="0"/>
                 <a:ea typeface="Inter" pitchFamily="34" charset="-122"/>
@@ -3464,7 +3464,7 @@
             <a:r>
               <a:rPr lang="en-US" sz="950" dirty="0">
                 <a:solidFill>
-                  <a:srgbClr val="545659"/>
+                  <a:srgbClr val="54565A"/>
                 </a:solidFill>
                 <a:latin typeface="Inter" pitchFamily="34" charset="0"/>
                 <a:ea typeface="Inter" pitchFamily="34" charset="-122"/>
@@ -3481,7 +3481,7 @@
             <a:r>
               <a:rPr lang="en-US" sz="950" dirty="0">
                 <a:solidFill>
-                  <a:srgbClr val="545659"/>
+                  <a:srgbClr val="54565A"/>
                 </a:solidFill>
                 <a:latin typeface="Inter" pitchFamily="34" charset="0"/>
                 <a:ea typeface="Inter" pitchFamily="34" charset="-122"/>
@@ -3642,7 +3642,7 @@
             <a:r>
               <a:rPr lang="en-US" sz="950" dirty="0">
                 <a:solidFill>
-                  <a:srgbClr val="545659"/>
+                  <a:srgbClr val="54565A"/>
                 </a:solidFill>
                 <a:latin typeface="Inter" pitchFamily="34" charset="0"/>
                 <a:ea typeface="Inter" pitchFamily="34" charset="-122"/>
@@ -3659,7 +3659,7 @@
             <a:r>
               <a:rPr lang="en-US" sz="950" dirty="0">
                 <a:solidFill>
-                  <a:srgbClr val="545659"/>
+                  <a:srgbClr val="54565A"/>
                 </a:solidFill>
                 <a:latin typeface="Inter" pitchFamily="34" charset="0"/>
                 <a:ea typeface="Inter" pitchFamily="34" charset="-122"/>
@@ -3676,7 +3676,7 @@
             <a:r>
               <a:rPr lang="en-US" sz="950" dirty="0">
                 <a:solidFill>
-                  <a:srgbClr val="545659"/>
+                  <a:srgbClr val="54565A"/>
                 </a:solidFill>
                 <a:latin typeface="Inter" pitchFamily="34" charset="0"/>
                 <a:ea typeface="Inter" pitchFamily="34" charset="-122"/>
@@ -3737,11 +3737,11 @@
             <a:avLst/>
           </a:prstGeom>
           <a:solidFill>
-            <a:srgbClr val="545659"/>
+            <a:srgbClr val="54565A"/>
           </a:solidFill>
           <a:ln w="12700">
             <a:solidFill>
-              <a:srgbClr val="545659"/>
+              <a:srgbClr val="54565A"/>
             </a:solidFill>
             <a:prstDash val="solid"/>
           </a:ln>
@@ -3774,7 +3774,7 @@
             <a:r>
               <a:rPr lang="en-US" sz="1200" b="1" dirty="0">
                 <a:solidFill>
-                  <a:srgbClr val="545659"/>
+                  <a:srgbClr val="54565A"/>
                 </a:solidFill>
                 <a:latin typeface="Inter" pitchFamily="34" charset="0"/>
                 <a:ea typeface="Inter" pitchFamily="34" charset="-122"/>
@@ -3902,7 +3902,7 @@
             <a:r>
               <a:rPr lang="en-US" sz="1000" i="1" dirty="0">
                 <a:solidFill>
-                  <a:srgbClr val="545659"/>
+                  <a:srgbClr val="54565A"/>
                 </a:solidFill>
                 <a:latin typeface="Inter" pitchFamily="34" charset="0"/>
                 <a:ea typeface="Inter" pitchFamily="34" charset="-122"/>
@@ -4029,7 +4029,7 @@
             <a:r>
               <a:rPr lang="en-US" sz="850" dirty="0">
                 <a:solidFill>
-                  <a:srgbClr val="545659"/>
+                  <a:srgbClr val="54565A"/>
                 </a:solidFill>
                 <a:latin typeface="Inter" pitchFamily="34" charset="0"/>
                 <a:ea typeface="Inter" pitchFamily="34" charset="-122"/>
@@ -4283,7 +4283,7 @@
             <a:r>
               <a:rPr lang="en-US" sz="900" dirty="0">
                 <a:solidFill>
-                  <a:srgbClr val="545659"/>
+                  <a:srgbClr val="54565A"/>
                 </a:solidFill>
                 <a:latin typeface="Inter" pitchFamily="34" charset="0"/>
                 <a:ea typeface="Inter" pitchFamily="34" charset="-122"/>
@@ -4300,7 +4300,7 @@
             <a:r>
               <a:rPr lang="en-US" sz="900" dirty="0">
                 <a:solidFill>
-                  <a:srgbClr val="545659"/>
+                  <a:srgbClr val="54565A"/>
                 </a:solidFill>
                 <a:latin typeface="Inter" pitchFamily="34" charset="0"/>
                 <a:ea typeface="Inter" pitchFamily="34" charset="-122"/>
@@ -4340,7 +4340,7 @@
                 <a:ea typeface="Inter" pitchFamily="34" charset="-122"/>
                 <a:cs typeface="Inter" pitchFamily="34" charset="-120"/>
               </a:rPr>
-              <a:t>Exceedance + late-delivery</a:t>
+              <a:t>Exceedance + late risk</a:t>
             </a:r>
             <a:endParaRPr lang="en-US" sz="900" dirty="0"/>
           </a:p>
@@ -4357,7 +4357,7 @@
                 <a:ea typeface="Inter" pitchFamily="34" charset="-122"/>
                 <a:cs typeface="Inter" pitchFamily="34" charset="-120"/>
               </a:rPr>
-              <a:t>models on governed data</a:t>
+              <a:t>on governed lakehouse</a:t>
             </a:r>
             <a:endParaRPr lang="en-US" sz="900" dirty="0"/>
           </a:p>
@@ -4478,7 +4478,7 @@
             <a:r>
               <a:rPr lang="en-US" sz="950" dirty="0">
                 <a:solidFill>
-                  <a:srgbClr val="545659"/>
+                  <a:srgbClr val="54565A"/>
                 </a:solidFill>
                 <a:latin typeface="Inter" pitchFamily="34" charset="0"/>
                 <a:ea typeface="Inter" pitchFamily="34" charset="-122"/>
@@ -4541,7 +4541,7 @@
             <a:r>
               <a:rPr lang="en-US" sz="950" dirty="0">
                 <a:solidFill>
-                  <a:srgbClr val="545659"/>
+                  <a:srgbClr val="54565A"/>
                 </a:solidFill>
                 <a:latin typeface="Inter" pitchFamily="34" charset="0"/>
                 <a:ea typeface="Inter" pitchFamily="34" charset="-122"/>
@@ -4604,7 +4604,7 @@
             <a:r>
               <a:rPr lang="en-US" sz="950" dirty="0">
                 <a:solidFill>
-                  <a:srgbClr val="545659"/>
+                  <a:srgbClr val="54565A"/>
                 </a:solidFill>
                 <a:latin typeface="Inter" pitchFamily="34" charset="0"/>
                 <a:ea typeface="Inter" pitchFamily="34" charset="-122"/>
@@ -4667,7 +4667,7 @@
             <a:r>
               <a:rPr lang="en-US" sz="950" dirty="0">
                 <a:solidFill>
-                  <a:srgbClr val="545659"/>
+                  <a:srgbClr val="54565A"/>
                 </a:solidFill>
                 <a:latin typeface="Inter" pitchFamily="34" charset="0"/>
                 <a:ea typeface="Inter" pitchFamily="34" charset="-122"/>
@@ -4694,11 +4694,11 @@
             <a:avLst/>
           </a:prstGeom>
           <a:solidFill>
-            <a:srgbClr val="545659"/>
+            <a:srgbClr val="54565A"/>
           </a:solidFill>
           <a:ln w="12700">
             <a:solidFill>
-              <a:srgbClr val="545659"/>
+              <a:srgbClr val="54565A"/>
             </a:solidFill>
             <a:prstDash val="solid"/>
           </a:ln>
@@ -4731,7 +4731,7 @@
             <a:r>
               <a:rPr lang="en-US" sz="1200" b="1" dirty="0">
                 <a:solidFill>
-                  <a:srgbClr val="545659"/>
+                  <a:srgbClr val="54565A"/>
                 </a:solidFill>
                 <a:latin typeface="Inter" pitchFamily="34" charset="0"/>
                 <a:ea typeface="Inter" pitchFamily="34" charset="-122"/>
@@ -4859,7 +4859,7 @@
             <a:r>
               <a:rPr lang="en-US" sz="1000" i="1" dirty="0">
                 <a:solidFill>
-                  <a:srgbClr val="545659"/>
+                  <a:srgbClr val="54565A"/>
                 </a:solidFill>
                 <a:latin typeface="Inter" pitchFamily="34" charset="0"/>
                 <a:ea typeface="Inter" pitchFamily="34" charset="-122"/>
@@ -4986,7 +4986,7 @@
             <a:r>
               <a:rPr lang="en-US" sz="850" dirty="0">
                 <a:solidFill>
-                  <a:srgbClr val="545659"/>
+                  <a:srgbClr val="54565A"/>
                 </a:solidFill>
                 <a:latin typeface="Inter" pitchFamily="34" charset="0"/>
                 <a:ea typeface="Inter" pitchFamily="34" charset="-122"/>
@@ -5152,7 +5152,7 @@
             <a:r>
               <a:rPr lang="en-US" sz="850" dirty="0">
                 <a:solidFill>
-                  <a:srgbClr val="545659"/>
+                  <a:srgbClr val="54565A"/>
                 </a:solidFill>
                 <a:latin typeface="Inter" pitchFamily="34" charset="0"/>
                 <a:ea typeface="Inter" pitchFamily="34" charset="-122"/>
@@ -5318,7 +5318,7 @@
             <a:r>
               <a:rPr lang="en-US" sz="850" dirty="0">
                 <a:solidFill>
-                  <a:srgbClr val="545659"/>
+                  <a:srgbClr val="54565A"/>
                 </a:solidFill>
                 <a:latin typeface="Inter" pitchFamily="34" charset="0"/>
                 <a:ea typeface="Inter" pitchFamily="34" charset="-122"/>
@@ -5484,7 +5484,7 @@
             <a:r>
               <a:rPr lang="en-US" sz="850" dirty="0">
                 <a:solidFill>
-                  <a:srgbClr val="545659"/>
+                  <a:srgbClr val="54565A"/>
                 </a:solidFill>
                 <a:latin typeface="Inter" pitchFamily="34" charset="0"/>
                 <a:ea typeface="Inter" pitchFamily="34" charset="-122"/>
@@ -5650,7 +5650,7 @@
             <a:r>
               <a:rPr lang="en-US" sz="850" dirty="0">
                 <a:solidFill>
-                  <a:srgbClr val="545659"/>
+                  <a:srgbClr val="54565A"/>
                 </a:solidFill>
                 <a:latin typeface="Inter" pitchFamily="34" charset="0"/>
                 <a:ea typeface="Inter" pitchFamily="34" charset="-122"/>
